--- a/ValueLink_소개.pptx
+++ b/ValueLink_소개.pptx
@@ -1404,7 +1404,7 @@
       </sp>
       <pic>
         <nvPicPr>
-          <cNvPr id="2" name="ValueLink Screenshot"/>
+          <cNvPr id="2" name="Screenshot"/>
           <cNvPicPr/>
         </nvPicPr>
         <blipFill>

--- a/ValueLink_소개.pptx
+++ b/ValueLink_소개.pptx
@@ -852,36 +852,36 @@
 </file>
 
 <file path=ppt/slides/slide1.xml><?xml version="1.0" encoding="utf-8"?>
-<sld xmlns="http://schemas.openxmlformats.org/presentationml/2006/main" xmlns:a="http://schemas.openxmlformats.org/drawingml/2006/main" xmlns:r="http://schemas.openxmlformats.org/officeDocument/2006/relationships">
-  <cSld name="Slide 1">
-    <bg>
-      <bgPr>
+<p:sld xmlns:a="http://schemas.openxmlformats.org/drawingml/2006/main" xmlns:r="http://schemas.openxmlformats.org/officeDocument/2006/relationships" xmlns:p="http://schemas.openxmlformats.org/presentationml/2006/main">
+  <p:cSld name="Slide 1">
+    <p:bg>
+      <p:bgPr>
         <a:solidFill>
           <a:srgbClr val="FFFFFF"/>
         </a:solidFill>
-      </bgPr>
-    </bg>
-    <spTree>
-      <nvGrpSpPr>
-        <cNvPr id="1" name=""/>
-        <cNvGrpSpPr/>
-        <nvPr/>
-      </nvGrpSpPr>
-      <grpSpPr>
+      </p:bgPr>
+    </p:bg>
+    <p:spTree>
+      <p:nvGrpSpPr>
+        <p:cNvPr id="1" name=""/>
+        <p:cNvGrpSpPr/>
+        <p:nvPr/>
+      </p:nvGrpSpPr>
+      <p:grpSpPr>
         <a:xfrm>
           <a:off x="0" y="0"/>
           <a:ext cx="0" cy="0"/>
           <a:chOff x="0" y="0"/>
           <a:chExt cx="0" cy="0"/>
         </a:xfrm>
-      </grpSpPr>
-      <sp>
-        <nvSpPr>
-          <cNvPr id="2" name="Text 0"/>
-          <cNvSpPr/>
-          <nvPr/>
-        </nvSpPr>
-        <spPr>
+      </p:grpSpPr>
+      <p:sp>
+        <p:nvSpPr>
+          <p:cNvPr id="2" name="Text 0"/>
+          <p:cNvSpPr/>
+          <p:nvPr/>
+        </p:nvSpPr>
+        <p:spPr>
           <a:xfrm>
             <a:off x="914400" y="640080"/>
             <a:ext cx="7315200" cy="640080"/>
@@ -891,8 +891,8 @@
           </a:prstGeom>
           <a:noFill/>
           <a:ln/>
-        </spPr>
-        <txBody>
+        </p:spPr>
+        <p:txBody>
           <a:bodyPr wrap="square" rtlCol="0" anchor="ctr"/>
           <a:lstStyle/>
           <a:p>
@@ -912,15 +912,15 @@
             </a:r>
             <a:endParaRPr lang="en-US" sz="4200" dirty="0"/>
           </a:p>
-        </txBody>
-      </sp>
-      <sp>
-        <nvSpPr>
-          <cNvPr id="3" name="Text 1"/>
-          <cNvSpPr/>
-          <nvPr/>
-        </nvSpPr>
-        <spPr>
+        </p:txBody>
+      </p:sp>
+      <p:sp>
+        <p:nvSpPr>
+          <p:cNvPr id="3" name="Text 1"/>
+          <p:cNvSpPr/>
+          <p:nvPr/>
+        </p:nvSpPr>
+        <p:spPr>
           <a:xfrm>
             <a:off x="914400" y="1371600"/>
             <a:ext cx="7315200" cy="365760"/>
@@ -930,8 +930,8 @@
           </a:prstGeom>
           <a:noFill/>
           <a:ln/>
-        </spPr>
-        <txBody>
+        </p:spPr>
+        <p:txBody>
           <a:bodyPr wrap="square" rtlCol="0" anchor="ctr"/>
           <a:lstStyle/>
           <a:p>
@@ -951,15 +951,15 @@
             </a:r>
             <a:endParaRPr lang="en-US" sz="1800" dirty="0"/>
           </a:p>
-        </txBody>
-      </sp>
-      <sp>
-        <nvSpPr>
-          <cNvPr id="4" name="Shape 2"/>
-          <cNvSpPr/>
-          <nvPr/>
-        </nvSpPr>
-        <spPr>
+        </p:txBody>
+      </p:sp>
+      <p:sp>
+        <p:nvSpPr>
+          <p:cNvPr id="4" name="Shape 2"/>
+          <p:cNvSpPr/>
+          <p:nvPr/>
+        </p:nvSpPr>
+        <p:spPr>
           <a:xfrm>
             <a:off x="2286000" y="1920240"/>
             <a:ext cx="4572000" cy="27432"/>
@@ -971,15 +971,15 @@
             <a:srgbClr val="CBD5E1"/>
           </a:solidFill>
           <a:ln/>
-        </spPr>
-      </sp>
-      <sp>
-        <nvSpPr>
-          <cNvPr id="5" name="Text 3"/>
-          <cNvSpPr/>
-          <nvPr/>
-        </nvSpPr>
-        <spPr>
+        </p:spPr>
+      </p:sp>
+      <p:sp>
+        <p:nvSpPr>
+          <p:cNvPr id="5" name="Text 3"/>
+          <p:cNvSpPr/>
+          <p:nvPr/>
+        </p:nvSpPr>
+        <p:spPr>
           <a:xfrm>
             <a:off x="1371600" y="2377440"/>
             <a:ext cx="6400800" cy="457200"/>
@@ -989,8 +989,8 @@
           </a:prstGeom>
           <a:noFill/>
           <a:ln/>
-        </spPr>
-        <txBody>
+        </p:spPr>
+        <p:txBody>
           <a:bodyPr wrap="square" rtlCol="0" anchor="ctr"/>
           <a:lstStyle/>
           <a:p>
@@ -1010,15 +1010,15 @@
             </a:r>
             <a:endParaRPr lang="en-US" sz="2000" dirty="0"/>
           </a:p>
-        </txBody>
-      </sp>
-      <sp>
-        <nvSpPr>
-          <cNvPr id="6" name="Shape 4"/>
-          <cNvSpPr/>
-          <nvPr/>
-        </nvSpPr>
-        <spPr>
+        </p:txBody>
+      </p:sp>
+      <p:sp>
+        <p:nvSpPr>
+          <p:cNvPr id="6" name="Shape 4"/>
+          <p:cNvSpPr/>
+          <p:nvPr/>
+        </p:nvSpPr>
+        <p:spPr>
           <a:xfrm>
             <a:off x="1645920" y="2971800"/>
             <a:ext cx="5943600" cy="1005840"/>
@@ -1032,15 +1032,15 @@
             <a:srgbClr val="DBEAFE"/>
           </a:solidFill>
           <a:ln/>
-        </spPr>
-      </sp>
-      <sp>
-        <nvSpPr>
-          <cNvPr id="7" name="Text 5"/>
-          <cNvSpPr/>
-          <nvPr/>
-        </nvSpPr>
-        <spPr>
+        </p:spPr>
+      </p:sp>
+      <p:sp>
+        <p:nvSpPr>
+          <p:cNvPr id="7" name="Text 5"/>
+          <p:cNvSpPr/>
+          <p:nvPr/>
+        </p:nvSpPr>
+        <p:spPr>
           <a:xfrm>
             <a:off x="1645920" y="3063240"/>
             <a:ext cx="5943600" cy="320040"/>
@@ -1050,8 +1050,8 @@
           </a:prstGeom>
           <a:noFill/>
           <a:ln/>
-        </spPr>
-        <txBody>
+        </p:spPr>
+        <p:txBody>
           <a:bodyPr wrap="square" rtlCol="0" anchor="ctr"/>
           <a:lstStyle/>
           <a:p>
@@ -1071,15 +1071,15 @@
             </a:r>
             <a:endParaRPr lang="en-US" sz="1400" dirty="0"/>
           </a:p>
-        </txBody>
-      </sp>
-      <sp>
-        <nvSpPr>
-          <cNvPr id="8" name="Text 6"/>
-          <cNvSpPr/>
-          <nvPr/>
-        </nvSpPr>
-        <spPr>
+        </p:txBody>
+      </p:sp>
+      <p:sp>
+        <p:nvSpPr>
+          <p:cNvPr id="8" name="Text 6"/>
+          <p:cNvSpPr/>
+          <p:nvPr/>
+        </p:nvSpPr>
+        <p:spPr>
           <a:xfrm>
             <a:off x="1645920" y="3429000"/>
             <a:ext cx="5943600" cy="365760"/>
@@ -1089,8 +1089,8 @@
           </a:prstGeom>
           <a:noFill/>
           <a:ln/>
-        </spPr>
-        <txBody>
+        </p:spPr>
+        <p:txBody>
           <a:bodyPr wrap="square" rtlCol="0" anchor="ctr"/>
           <a:lstStyle/>
           <a:p>
@@ -1138,15 +1138,15 @@
             </a:r>
             <a:endParaRPr lang="en-US" sz="1600" dirty="0"/>
           </a:p>
-        </txBody>
-      </sp>
-      <sp>
-        <nvSpPr>
-          <cNvPr id="9" name="Text 7"/>
-          <cNvSpPr/>
-          <nvPr/>
-        </nvSpPr>
-        <spPr>
+        </p:txBody>
+      </p:sp>
+      <p:sp>
+        <p:nvSpPr>
+          <p:cNvPr id="9" name="Text 7"/>
+          <p:cNvSpPr/>
+          <p:nvPr/>
+        </p:nvSpPr>
+        <p:spPr>
           <a:xfrm>
             <a:off x="1645920" y="4206240"/>
             <a:ext cx="5943600" cy="320040"/>
@@ -1156,8 +1156,8 @@
           </a:prstGeom>
           <a:noFill/>
           <a:ln/>
-        </spPr>
-        <txBody>
+        </p:spPr>
+        <p:txBody>
           <a:bodyPr wrap="square" rtlCol="0" anchor="ctr"/>
           <a:lstStyle/>
           <a:p>
@@ -1177,15 +1177,15 @@
             </a:r>
             <a:endParaRPr lang="en-US" sz="1500" dirty="0"/>
           </a:p>
-        </txBody>
-      </sp>
-      <sp>
-        <nvSpPr>
-          <cNvPr id="10" name="Text 8"/>
-          <cNvSpPr/>
-          <nvPr/>
-        </nvSpPr>
-        <spPr>
+        </p:txBody>
+      </p:sp>
+      <p:sp>
+        <p:nvSpPr>
+          <p:cNvPr id="10" name="Text 8"/>
+          <p:cNvSpPr/>
+          <p:nvPr/>
+        </p:nvSpPr>
+        <p:spPr>
           <a:xfrm>
             <a:off x="1920240" y="4572000"/>
             <a:ext cx="5669280" cy="1188720"/>
@@ -1195,8 +1195,8 @@
           </a:prstGeom>
           <a:noFill/>
           <a:ln/>
-        </spPr>
-        <txBody>
+        </p:spPr>
+        <p:txBody>
           <a:bodyPr wrap="square" rtlCol="0" anchor="ctr"/>
           <a:lstStyle/>
           <a:p>
@@ -1299,15 +1299,15 @@
             </a:r>
             <a:endParaRPr lang="en-US" sz="1400" dirty="0"/>
           </a:p>
-        </txBody>
-      </sp>
-      <sp>
-        <nvSpPr>
-          <cNvPr id="11" name="Text 9"/>
-          <cNvSpPr/>
-          <nvPr/>
-        </nvSpPr>
-        <spPr>
+        </p:txBody>
+      </p:sp>
+      <p:sp>
+        <p:nvSpPr>
+          <p:cNvPr id="11" name="Text 9"/>
+          <p:cNvSpPr/>
+          <p:nvPr/>
+        </p:nvSpPr>
+        <p:spPr>
           <a:xfrm>
             <a:off x="1371600" y="5943600"/>
             <a:ext cx="6400800" cy="365760"/>
@@ -1317,8 +1317,8 @@
           </a:prstGeom>
           <a:noFill/>
           <a:ln/>
-        </spPr>
-        <txBody>
+        </p:spPr>
+        <p:txBody>
           <a:bodyPr wrap="square" rtlCol="0" anchor="ctr"/>
           <a:lstStyle/>
           <a:p>
@@ -1338,15 +1338,15 @@
             </a:r>
             <a:endParaRPr lang="en-US" sz="1800" dirty="0"/>
           </a:p>
-        </txBody>
-      </sp>
-      <sp>
-        <nvSpPr>
-          <cNvPr id="12" name="Text 10"/>
-          <cNvSpPr/>
-          <nvPr/>
-        </nvSpPr>
-        <spPr>
+        </p:txBody>
+      </p:sp>
+      <p:sp>
+        <p:nvSpPr>
+          <p:cNvPr id="12" name="Text 10"/>
+          <p:cNvSpPr/>
+          <p:nvPr/>
+        </p:nvSpPr>
+        <p:spPr>
           <a:xfrm>
             <a:off x="1645920" y="6355080"/>
             <a:ext cx="5943600" cy="777240"/>
@@ -1356,8 +1356,8 @@
           </a:prstGeom>
           <a:noFill/>
           <a:ln/>
-        </spPr>
-        <txBody>
+        </p:spPr>
+        <p:txBody>
           <a:bodyPr wrap="square" rtlCol="0" anchor="ctr"/>
           <a:lstStyle/>
           <a:p>
@@ -1400,35 +1400,14 @@
             </a:r>
             <a:endParaRPr lang="en-US" sz="1300" dirty="0"/>
           </a:p>
-        </txBody>
-      </sp>
-      <pic>
-        <nvPicPr>
-          <cNvPr id="2" name="Screenshot"/>
-          <cNvPicPr/>
-        </nvPicPr>
-        <blipFill>
-          <a:blip r:embed="rId4"/>
-          <a:stretch>
-            <a:fillRect/>
-          </a:stretch>
-        </blipFill>
-        <spPr>
-          <a:xfrm>
-            <a:off x="914400" y="4572000"/>
-            <a:ext cx="7772400" cy="4635000"/>
-          </a:xfrm>
-          <a:prstGeom prst="rect">
-            <a:avLst/>
-          </a:prstGeom>
-        </spPr>
-      </pic>
-    </spTree>
-  </cSld>
-  <clrMapOvr>
+        </p:txBody>
+      </p:sp>
+    </p:spTree>
+  </p:cSld>
+  <p:clrMapOvr>
     <a:masterClrMapping/>
-  </clrMapOvr>
-</sld>
+  </p:clrMapOvr>
+</p:sld>
 </file>
 
 <file path=ppt/theme/theme1.xml><?xml version="1.0" encoding="utf-8"?>
